--- a/companies/calderwood-partners/Engagements/Stark-Wilson/2011.06.13 - Briefing Deck - Stark-Wilson.pptx
+++ b/companies/calderwood-partners/Engagements/Stark-Wilson/2011.06.13 - Briefing Deck - Stark-Wilson.pptx
@@ -3139,27 +3139,9 @@
             </a:r>
           </a:p>
           <a:p>
-            <a:pPr lvl="1"/>
-            <a:r>
-              <a:t>Client sponsor: Julie Gonzalez, Director of Operations, Stark-Wilson</a:t>
-            </a:r>
-          </a:p>
-          <a:p>
-            <a:pPr lvl="1"/>
-            <a:r>
-              <a:t>Calderwood engagement team: Julie Parks and Deborah Gordon</a:t>
-            </a:r>
-          </a:p>
-          <a:p>
-            <a:pPr lvl="1"/>
-            <a:r>
-              <a:t>Start of work: May 10, 2011</a:t>
-            </a:r>
-          </a:p>
-          <a:p>
-            <a:pPr lvl="1"/>
-            <a:r>
-              <a:t>Progress briefing for the client, early in the engagement</a:t>
+            <a:pPr/>
+            <a:r>
+              <a:t>An interim briefing for the leadership team. The engagement opened on May 10, 2011 and is in its early weeks. This is a read of where the work stands and what we are examining, not a set of conclusions; those come later, and only once the evidence behind them is settled with your people.</a:t>
             </a:r>
           </a:p>
         </p:txBody>
@@ -3203,7 +3185,7 @@
                   <a:srgbClr val="4A2E2A"/>
                 </a:solidFill>
               </a:rPr>
-              <a:t>The Mandate</a:t>
+              <a:t>Where the Work Stands</a:t>
             </a:r>
           </a:p>
         </p:txBody>
@@ -3225,25 +3207,25 @@
           <a:p>
             <a:pPr lvl="1"/>
             <a:r>
-              <a:t>Diagnose how the company is organized to run today, layer by layer and decision by decision</a:t>
+              <a:t>The current-state read is under way: how the organization is directed today across its main functions.</a:t>
             </a:r>
           </a:p>
           <a:p>
             <a:pPr lvl="1"/>
             <a:r>
-              <a:t>Design a target structure with clear decision rights and the governance to hold them</a:t>
+              <a:t>Nothing here is a recommendation. The design work follows once the present picture is settled.</a:t>
             </a:r>
           </a:p>
           <a:p>
             <a:pPr lvl="1"/>
             <a:r>
-              <a:t>Sequence the change into a plan the business can act on without stalling the operation</a:t>
+              <a:t>Deborah Gordon has the map drafted for the two largest functions and is closing the remainder.</a:t>
             </a:r>
           </a:p>
           <a:p>
             <a:pPr lvl="1"/>
             <a:r>
-              <a:t>Work from the company's own charts and reporting, not a template carried in from another client</a:t>
+              <a:t>Today is about sharing what we are examining and agreeing the questions worth pursuing.</a:t>
             </a:r>
           </a:p>
         </p:txBody>
@@ -3309,25 +3291,19 @@
           <a:p>
             <a:pPr lvl="1"/>
             <a:r>
-              <a:t>Build the baseline from your own charts and reporting, so every figure traces to a source you already keep</a:t>
+              <a:t>We start by listening, then set down the few judgments the design turns on.</a:t>
             </a:r>
           </a:p>
           <a:p>
             <a:pPr lvl="1"/>
             <a:r>
-              <a:t>Interview the leadership on how decisions are actually made, not only how the chart says they should be</a:t>
+              <a:t>Every recommendation traces back to the evidence beneath it, figure by figure.</a:t>
             </a:r>
           </a:p>
           <a:p>
             <a:pPr lvl="1"/>
             <a:r>
-              <a:t>Route data and access through a single sponsor, Julie Gonzalez, to keep the requests coordinated</a:t>
-            </a:r>
-          </a:p>
-          <a:p>
-            <a:pPr lvl="1"/>
-            <a:r>
-              <a:t>Check in with your office each week, so nothing waits for the next formal milestone to surface</a:t>
+              <a:t>Where the evidence supports only a range, we say so rather than round it off to look finished.</a:t>
             </a:r>
           </a:p>
         </p:txBody>
@@ -3371,7 +3347,7 @@
                   <a:srgbClr val="4A2E2A"/>
                 </a:solidFill>
               </a:rPr>
-              <a:t>Where the Work Stands</a:t>
+              <a:t>Your Team</a:t>
             </a:r>
           </a:p>
         </p:txBody>
@@ -3393,25 +3369,19 @@
           <a:p>
             <a:pPr lvl="1"/>
             <a:r>
-              <a:t>Organization charts and two years of management reporting received and logged</a:t>
+              <a:t>Julie Parks, Senior Engagement Manager, runs the engagement and is your point of contact.</a:t>
             </a:r>
           </a:p>
           <a:p>
             <a:pPr lvl="1"/>
             <a:r>
-              <a:t>Cost and headcount baseline under construction, tied line by line to the company's own accounts</a:t>
+              <a:t>Deborah Gordon, Associate, carries the analysis and builds the exhibits behind it.</a:t>
             </a:r>
           </a:p>
           <a:p>
             <a:pPr lvl="1"/>
             <a:r>
-              <a:t>Cost-center reporting now in hand, so spend can be tied to the structure rather than the balance sheet</a:t>
-            </a:r>
-          </a:p>
-          <a:p>
-            <a:pPr lvl="1"/>
-            <a:r>
-              <a:t>Interview schedule set with the leadership team; first sessions beginning this month</a:t>
+              <a:t>Sponsored on your side by Julie Gonzalez, Director of Operations, who owns the data requests.</a:t>
             </a:r>
           </a:p>
         </p:txBody>
@@ -3455,7 +3425,7 @@
                   <a:srgbClr val="4A2E2A"/>
                 </a:solidFill>
               </a:rPr>
-              <a:t>What the Diagnostic Will Settle</a:t>
+              <a:t>What We Are Examining</a:t>
             </a:r>
           </a:p>
         </p:txBody>
@@ -3477,25 +3447,25 @@
           <a:p>
             <a:pPr lvl="1"/>
             <a:r>
-              <a:t>Whether the reporting layers match the work the headcount actually carries</a:t>
+              <a:t>The reporting lines, the spans of control, and the layers between the top of the house and the front line.</a:t>
             </a:r>
           </a:p>
           <a:p>
             <a:pPr lvl="1"/>
             <a:r>
-              <a:t>Where decision rights on the chart differ from how decisions are made in practice</a:t>
+              <a:t>What each manager is accountable for, and where two managers believe they own the same thing.</a:t>
             </a:r>
           </a:p>
           <a:p>
             <a:pPr lvl="1"/>
             <a:r>
-              <a:t>Which parts of the current structure fit where the business is going, and which are holding it back</a:t>
+              <a:t>How a handful of everyday decisions actually travel, and where authority sits away from the work.</a:t>
             </a:r>
           </a:p>
           <a:p>
             <a:pPr lvl="1"/>
             <a:r>
-              <a:t>What the current design costs, once the soft internal allocations are cleaned up</a:t>
+              <a:t>Where the structure is heavy and where it is thin, against a sensible benchmark.</a:t>
             </a:r>
           </a:p>
         </p:txBody>
@@ -3561,25 +3531,25 @@
           <a:p>
             <a:pPr lvl="1"/>
             <a:r>
-              <a:t>Complete the leadership interviews over the next two weeks</a:t>
+              <a:t>Close the current-state read across the remaining functions.</a:t>
             </a:r>
           </a:p>
           <a:p>
             <a:pPr lvl="1"/>
             <a:r>
-              <a:t>Finish the cost baseline and reconcile it fully to the management accounts</a:t>
+              <a:t>Confirm the roles that appear under two managers at once.</a:t>
             </a:r>
           </a:p>
           <a:p>
             <a:pPr lvl="1"/>
             <a:r>
-              <a:t>Bring the first current-state findings back for review before the diagnostic is drafted</a:t>
+              <a:t>Keep data requests flowing through Julie Gonzalez as a single consolidated list.</a:t>
             </a:r>
           </a:p>
           <a:p>
             <a:pPr lvl="1"/>
             <a:r>
-              <a:t>Deborah Gordon coordinates the scheduling; Julie Parks is the point of contact for anything on the engagement</a:t>
+              <a:t>Agree the two or three questions the design should turn on.</a:t>
             </a:r>
           </a:p>
         </p:txBody>
